--- a/Grand Oral/Gestion_stocks/Gestions_stocks.pptx
+++ b/Grand Oral/Gestion_stocks/Gestions_stocks.pptx
@@ -2478,6 +2478,13 @@
         </dgm:presLayoutVars>
       </dgm:prSet>
       <dgm:spPr/>
+      <dgm:t>
+        <a:bodyPr/>
+        <a:lstStyle/>
+        <a:p>
+          <a:endParaRPr lang="fr-FR"/>
+        </a:p>
+      </dgm:t>
     </dgm:pt>
     <dgm:pt modelId="{C1EA1D7A-3539-484A-8E8C-00463BBFC702}" type="pres">
       <dgm:prSet presAssocID="{AE2C6860-2F86-43B6-B44D-C595868CCD63}" presName="parentText" presStyleLbl="node1" presStyleIdx="0" presStyleCnt="2">
@@ -2487,6 +2494,13 @@
         </dgm:presLayoutVars>
       </dgm:prSet>
       <dgm:spPr/>
+      <dgm:t>
+        <a:bodyPr/>
+        <a:lstStyle/>
+        <a:p>
+          <a:endParaRPr lang="fr-FR"/>
+        </a:p>
+      </dgm:t>
     </dgm:pt>
     <dgm:pt modelId="{60CD819D-91E1-4111-B429-FD229EEDC96C}" type="pres">
       <dgm:prSet presAssocID="{4FE38B72-14B3-45A4-BB14-979E0911A310}" presName="spacer" presStyleCnt="0"/>
@@ -2500,14 +2514,21 @@
         </dgm:presLayoutVars>
       </dgm:prSet>
       <dgm:spPr/>
+      <dgm:t>
+        <a:bodyPr/>
+        <a:lstStyle/>
+        <a:p>
+          <a:endParaRPr lang="fr-FR"/>
+        </a:p>
+      </dgm:t>
     </dgm:pt>
   </dgm:ptLst>
   <dgm:cxnLst>
     <dgm:cxn modelId="{7BDCEF17-1940-40C6-B3ED-83F37829502E}" srcId="{6BCEC3E1-E1C6-475A-9BA0-8777A6AE8033}" destId="{AED0DB49-9322-476E-A0A2-121F49AC3BF1}" srcOrd="1" destOrd="0" parTransId="{04100EF8-DD8D-4FA9-99BD-292F5C03941A}" sibTransId="{89E09CF2-017A-4253-A3BF-BFF6D5F66810}"/>
     <dgm:cxn modelId="{AF7B6E5D-6DAD-47AD-9986-5532C6A22C18}" type="presOf" srcId="{6BCEC3E1-E1C6-475A-9BA0-8777A6AE8033}" destId="{3CD77958-6C1D-4F7F-B85E-8084030CA4DB}" srcOrd="0" destOrd="0" presId="urn:microsoft.com/office/officeart/2005/8/layout/vList2"/>
-    <dgm:cxn modelId="{14BC4B57-4B16-4E94-9BDC-6428C0933AD2}" srcId="{6BCEC3E1-E1C6-475A-9BA0-8777A6AE8033}" destId="{AE2C6860-2F86-43B6-B44D-C595868CCD63}" srcOrd="0" destOrd="0" parTransId="{65642662-7661-4AA0-8E1C-49A6A1258F8D}" sibTransId="{4FE38B72-14B3-45A4-BB14-979E0911A310}"/>
     <dgm:cxn modelId="{7922EE7B-F63C-4632-8497-8E8D6781F8A2}" type="presOf" srcId="{AE2C6860-2F86-43B6-B44D-C595868CCD63}" destId="{C1EA1D7A-3539-484A-8E8C-00463BBFC702}" srcOrd="0" destOrd="0" presId="urn:microsoft.com/office/officeart/2005/8/layout/vList2"/>
     <dgm:cxn modelId="{95858190-128D-4A04-B7D2-E310BCD4FC11}" type="presOf" srcId="{AED0DB49-9322-476E-A0A2-121F49AC3BF1}" destId="{2E4A4B5F-275E-4A6D-9560-47217F88C326}" srcOrd="0" destOrd="0" presId="urn:microsoft.com/office/officeart/2005/8/layout/vList2"/>
+    <dgm:cxn modelId="{14BC4B57-4B16-4E94-9BDC-6428C0933AD2}" srcId="{6BCEC3E1-E1C6-475A-9BA0-8777A6AE8033}" destId="{AE2C6860-2F86-43B6-B44D-C595868CCD63}" srcOrd="0" destOrd="0" parTransId="{65642662-7661-4AA0-8E1C-49A6A1258F8D}" sibTransId="{4FE38B72-14B3-45A4-BB14-979E0911A310}"/>
     <dgm:cxn modelId="{3463E4BC-80AD-494E-BA30-3FB0D173C210}" type="presParOf" srcId="{3CD77958-6C1D-4F7F-B85E-8084030CA4DB}" destId="{C1EA1D7A-3539-484A-8E8C-00463BBFC702}" srcOrd="0" destOrd="0" presId="urn:microsoft.com/office/officeart/2005/8/layout/vList2"/>
     <dgm:cxn modelId="{F081C32B-55D8-4922-9BA5-E9E86802DE46}" type="presParOf" srcId="{3CD77958-6C1D-4F7F-B85E-8084030CA4DB}" destId="{60CD819D-91E1-4111-B429-FD229EEDC96C}" srcOrd="1" destOrd="0" presId="urn:microsoft.com/office/officeart/2005/8/layout/vList2"/>
     <dgm:cxn modelId="{AC4538AA-18CE-4777-BBCE-47FB805B5E6C}" type="presParOf" srcId="{3CD77958-6C1D-4F7F-B85E-8084030CA4DB}" destId="{2E4A4B5F-275E-4A6D-9560-47217F88C326}" srcOrd="2" destOrd="0" presId="urn:microsoft.com/office/officeart/2005/8/layout/vList2"/>
@@ -2748,6 +2769,13 @@
         </dgm:presLayoutVars>
       </dgm:prSet>
       <dgm:spPr/>
+      <dgm:t>
+        <a:bodyPr/>
+        <a:lstStyle/>
+        <a:p>
+          <a:endParaRPr lang="fr-FR"/>
+        </a:p>
+      </dgm:t>
     </dgm:pt>
     <dgm:pt modelId="{BBF63D58-C55D-482D-932E-0CEAAD7B3AEB}" type="pres">
       <dgm:prSet presAssocID="{EEFE5708-3CBB-4D1E-883E-E869178B5652}" presName="root1" presStyleCnt="0"/>
@@ -2760,6 +2788,13 @@
         </dgm:presLayoutVars>
       </dgm:prSet>
       <dgm:spPr/>
+      <dgm:t>
+        <a:bodyPr/>
+        <a:lstStyle/>
+        <a:p>
+          <a:endParaRPr lang="fr-FR"/>
+        </a:p>
+      </dgm:t>
     </dgm:pt>
     <dgm:pt modelId="{CA2EB991-20CB-4AB4-B411-563E6DA18787}" type="pres">
       <dgm:prSet presAssocID="{EEFE5708-3CBB-4D1E-883E-E869178B5652}" presName="level2hierChild" presStyleCnt="0"/>
@@ -2776,6 +2811,13 @@
         </dgm:presLayoutVars>
       </dgm:prSet>
       <dgm:spPr/>
+      <dgm:t>
+        <a:bodyPr/>
+        <a:lstStyle/>
+        <a:p>
+          <a:endParaRPr lang="fr-FR"/>
+        </a:p>
+      </dgm:t>
     </dgm:pt>
     <dgm:pt modelId="{9EFACB61-F8C8-4F8D-B309-4CF22E9FF1F7}" type="pres">
       <dgm:prSet presAssocID="{7D252F67-8355-450D-ABD6-B4530FE11576}" presName="level2hierChild" presStyleCnt="0"/>
@@ -2784,10 +2826,24 @@
     <dgm:pt modelId="{79DFBC0B-643D-473A-A2C8-5EF802ECF998}" type="pres">
       <dgm:prSet presAssocID="{FF48C3AE-5DDD-46F8-84C3-EE9D6E39914E}" presName="conn2-1" presStyleLbl="parChTrans1D2" presStyleIdx="0" presStyleCnt="3"/>
       <dgm:spPr/>
+      <dgm:t>
+        <a:bodyPr/>
+        <a:lstStyle/>
+        <a:p>
+          <a:endParaRPr lang="fr-FR"/>
+        </a:p>
+      </dgm:t>
     </dgm:pt>
     <dgm:pt modelId="{EBF98E28-0F71-40D7-96E0-C2EABBE8E075}" type="pres">
       <dgm:prSet presAssocID="{FF48C3AE-5DDD-46F8-84C3-EE9D6E39914E}" presName="connTx" presStyleLbl="parChTrans1D2" presStyleIdx="0" presStyleCnt="3"/>
       <dgm:spPr/>
+      <dgm:t>
+        <a:bodyPr/>
+        <a:lstStyle/>
+        <a:p>
+          <a:endParaRPr lang="fr-FR"/>
+        </a:p>
+      </dgm:t>
     </dgm:pt>
     <dgm:pt modelId="{5C50B1C4-322C-479D-A10B-4F22E155E6F9}" type="pres">
       <dgm:prSet presAssocID="{FF28BF28-2050-4518-BABD-86D81BA07B69}" presName="root2" presStyleCnt="0"/>
@@ -2800,6 +2856,13 @@
         </dgm:presLayoutVars>
       </dgm:prSet>
       <dgm:spPr/>
+      <dgm:t>
+        <a:bodyPr/>
+        <a:lstStyle/>
+        <a:p>
+          <a:endParaRPr lang="fr-FR"/>
+        </a:p>
+      </dgm:t>
     </dgm:pt>
     <dgm:pt modelId="{A36A7C4E-6964-4ACB-A2C5-E73D339E900E}" type="pres">
       <dgm:prSet presAssocID="{FF28BF28-2050-4518-BABD-86D81BA07B69}" presName="level3hierChild" presStyleCnt="0"/>
@@ -2808,10 +2871,24 @@
     <dgm:pt modelId="{521053F6-7F7F-4562-A57C-D65242245D5A}" type="pres">
       <dgm:prSet presAssocID="{8830E416-AD45-4161-B7B5-365DA1F10A49}" presName="conn2-1" presStyleLbl="parChTrans1D2" presStyleIdx="1" presStyleCnt="3"/>
       <dgm:spPr/>
+      <dgm:t>
+        <a:bodyPr/>
+        <a:lstStyle/>
+        <a:p>
+          <a:endParaRPr lang="fr-FR"/>
+        </a:p>
+      </dgm:t>
     </dgm:pt>
     <dgm:pt modelId="{19ACA653-2757-466D-814C-3CDC1E33AB08}" type="pres">
       <dgm:prSet presAssocID="{8830E416-AD45-4161-B7B5-365DA1F10A49}" presName="connTx" presStyleLbl="parChTrans1D2" presStyleIdx="1" presStyleCnt="3"/>
       <dgm:spPr/>
+      <dgm:t>
+        <a:bodyPr/>
+        <a:lstStyle/>
+        <a:p>
+          <a:endParaRPr lang="fr-FR"/>
+        </a:p>
+      </dgm:t>
     </dgm:pt>
     <dgm:pt modelId="{52921585-92E6-4721-A62F-CE9625219B10}" type="pres">
       <dgm:prSet presAssocID="{921F7E0C-0844-4852-A1C7-819C4E187F46}" presName="root2" presStyleCnt="0"/>
@@ -2824,6 +2901,13 @@
         </dgm:presLayoutVars>
       </dgm:prSet>
       <dgm:spPr/>
+      <dgm:t>
+        <a:bodyPr/>
+        <a:lstStyle/>
+        <a:p>
+          <a:endParaRPr lang="fr-FR"/>
+        </a:p>
+      </dgm:t>
     </dgm:pt>
     <dgm:pt modelId="{D7ACEAA0-491D-42B1-9D97-146F702536D3}" type="pres">
       <dgm:prSet presAssocID="{921F7E0C-0844-4852-A1C7-819C4E187F46}" presName="level3hierChild" presStyleCnt="0"/>
@@ -2832,10 +2916,24 @@
     <dgm:pt modelId="{C8173210-5E84-4FF9-9CA9-5CF207B87C4B}" type="pres">
       <dgm:prSet presAssocID="{2CC8E05E-2206-407F-8356-5889CFD7BB9E}" presName="conn2-1" presStyleLbl="parChTrans1D2" presStyleIdx="2" presStyleCnt="3"/>
       <dgm:spPr/>
+      <dgm:t>
+        <a:bodyPr/>
+        <a:lstStyle/>
+        <a:p>
+          <a:endParaRPr lang="fr-FR"/>
+        </a:p>
+      </dgm:t>
     </dgm:pt>
     <dgm:pt modelId="{18CC71CA-3BFD-4DD8-B929-12980D15B8FD}" type="pres">
       <dgm:prSet presAssocID="{2CC8E05E-2206-407F-8356-5889CFD7BB9E}" presName="connTx" presStyleLbl="parChTrans1D2" presStyleIdx="2" presStyleCnt="3"/>
       <dgm:spPr/>
+      <dgm:t>
+        <a:bodyPr/>
+        <a:lstStyle/>
+        <a:p>
+          <a:endParaRPr lang="fr-FR"/>
+        </a:p>
+      </dgm:t>
     </dgm:pt>
     <dgm:pt modelId="{49A3880B-ABBF-4C9C-B187-F8BCAB40583A}" type="pres">
       <dgm:prSet presAssocID="{987D5D6B-D14E-4D2C-A174-E0141DC98203}" presName="root2" presStyleCnt="0"/>
@@ -2848,6 +2946,13 @@
         </dgm:presLayoutVars>
       </dgm:prSet>
       <dgm:spPr/>
+      <dgm:t>
+        <a:bodyPr/>
+        <a:lstStyle/>
+        <a:p>
+          <a:endParaRPr lang="fr-FR"/>
+        </a:p>
+      </dgm:t>
     </dgm:pt>
     <dgm:pt modelId="{895EC29B-EA83-4B4C-921F-5060AD3D7906}" type="pres">
       <dgm:prSet presAssocID="{987D5D6B-D14E-4D2C-A174-E0141DC98203}" presName="level3hierChild" presStyleCnt="0"/>
@@ -2855,23 +2960,23 @@
     </dgm:pt>
   </dgm:ptLst>
   <dgm:cxnLst>
+    <dgm:cxn modelId="{78FD488C-F373-4FD1-86ED-CCE961CDDE9B}" type="presOf" srcId="{8830E416-AD45-4161-B7B5-365DA1F10A49}" destId="{521053F6-7F7F-4562-A57C-D65242245D5A}" srcOrd="0" destOrd="0" presId="urn:microsoft.com/office/officeart/2005/8/layout/hierarchy2"/>
+    <dgm:cxn modelId="{2A9BE914-6F01-40E9-927D-86802F360AB6}" type="presOf" srcId="{7D252F67-8355-450D-ABD6-B4530FE11576}" destId="{B09D06CF-E959-4471-9FC0-4A6E69C23715}" srcOrd="0" destOrd="0" presId="urn:microsoft.com/office/officeart/2005/8/layout/hierarchy2"/>
+    <dgm:cxn modelId="{064AECC1-F72D-41B6-A7E0-987BC1C8801C}" srcId="{7D252F67-8355-450D-ABD6-B4530FE11576}" destId="{987D5D6B-D14E-4D2C-A174-E0141DC98203}" srcOrd="2" destOrd="0" parTransId="{2CC8E05E-2206-407F-8356-5889CFD7BB9E}" sibTransId="{0F7CAF48-473D-4D4A-BC76-6B3A0AB9795C}"/>
+    <dgm:cxn modelId="{2C4684B3-3F26-44CF-8D8D-FA0D7F805889}" srcId="{7D252F67-8355-450D-ABD6-B4530FE11576}" destId="{921F7E0C-0844-4852-A1C7-819C4E187F46}" srcOrd="1" destOrd="0" parTransId="{8830E416-AD45-4161-B7B5-365DA1F10A49}" sibTransId="{24FEF229-4A6E-4302-B527-8F1C79D0BA38}"/>
+    <dgm:cxn modelId="{ACB00330-157E-42CD-AE23-38E8D6C84DFD}" type="presOf" srcId="{FF48C3AE-5DDD-46F8-84C3-EE9D6E39914E}" destId="{79DFBC0B-643D-473A-A2C8-5EF802ECF998}" srcOrd="0" destOrd="0" presId="urn:microsoft.com/office/officeart/2005/8/layout/hierarchy2"/>
+    <dgm:cxn modelId="{60EF55AD-BB33-493B-9A05-63BC7432B89C}" srcId="{6AFCE692-BBA0-44E9-927C-0E9B7C8DEC2A}" destId="{7D252F67-8355-450D-ABD6-B4530FE11576}" srcOrd="1" destOrd="0" parTransId="{104DA99D-271E-4DFE-85CB-E8ABAFC9BCE8}" sibTransId="{4A64466C-D213-4B59-A990-EA99346957A3}"/>
+    <dgm:cxn modelId="{CBC796CA-3DED-4B1C-9CB2-A36E44DAA013}" type="presOf" srcId="{EEFE5708-3CBB-4D1E-883E-E869178B5652}" destId="{00C8A6FF-2308-4840-93AF-ABF5D824F921}" srcOrd="0" destOrd="0" presId="urn:microsoft.com/office/officeart/2005/8/layout/hierarchy2"/>
+    <dgm:cxn modelId="{0A4908D5-40AB-4CF5-B3A9-D0A40AA51058}" srcId="{7D252F67-8355-450D-ABD6-B4530FE11576}" destId="{FF28BF28-2050-4518-BABD-86D81BA07B69}" srcOrd="0" destOrd="0" parTransId="{FF48C3AE-5DDD-46F8-84C3-EE9D6E39914E}" sibTransId="{F5C7288B-054A-4617-8DFE-920D62F155D7}"/>
+    <dgm:cxn modelId="{EA7DBFE5-EBC7-46FC-B959-CAEF6BDC631A}" type="presOf" srcId="{2CC8E05E-2206-407F-8356-5889CFD7BB9E}" destId="{18CC71CA-3BFD-4DD8-B929-12980D15B8FD}" srcOrd="1" destOrd="0" presId="urn:microsoft.com/office/officeart/2005/8/layout/hierarchy2"/>
+    <dgm:cxn modelId="{0C9EB94D-ADE0-4DAF-800A-0EB7CD8CCB74}" type="presOf" srcId="{8830E416-AD45-4161-B7B5-365DA1F10A49}" destId="{19ACA653-2757-466D-814C-3CDC1E33AB08}" srcOrd="1" destOrd="0" presId="urn:microsoft.com/office/officeart/2005/8/layout/hierarchy2"/>
+    <dgm:cxn modelId="{2D863E16-4175-413E-B9DD-09269B1AC609}" type="presOf" srcId="{FF48C3AE-5DDD-46F8-84C3-EE9D6E39914E}" destId="{EBF98E28-0F71-40D7-96E0-C2EABBE8E075}" srcOrd="1" destOrd="0" presId="urn:microsoft.com/office/officeart/2005/8/layout/hierarchy2"/>
+    <dgm:cxn modelId="{6E3BAB9F-B3D5-4AAB-8749-F2F8A9A29396}" srcId="{6AFCE692-BBA0-44E9-927C-0E9B7C8DEC2A}" destId="{EEFE5708-3CBB-4D1E-883E-E869178B5652}" srcOrd="0" destOrd="0" parTransId="{47733319-140D-421A-B6C5-6BA22715B9BE}" sibTransId="{D022AF69-9E73-4C0F-9B98-7331798164FC}"/>
+    <dgm:cxn modelId="{B74A6CD6-0D8D-4320-8E5E-A1DE343A84D4}" type="presOf" srcId="{FF28BF28-2050-4518-BABD-86D81BA07B69}" destId="{615C9960-D98D-4127-BF75-B3A796FD9DE3}" srcOrd="0" destOrd="0" presId="urn:microsoft.com/office/officeart/2005/8/layout/hierarchy2"/>
     <dgm:cxn modelId="{19834213-2919-42B3-B44A-86B94422EA48}" type="presOf" srcId="{921F7E0C-0844-4852-A1C7-819C4E187F46}" destId="{F6ACFC75-90C1-4FDF-9F85-56E4E06BF446}" srcOrd="0" destOrd="0" presId="urn:microsoft.com/office/officeart/2005/8/layout/hierarchy2"/>
-    <dgm:cxn modelId="{2A9BE914-6F01-40E9-927D-86802F360AB6}" type="presOf" srcId="{7D252F67-8355-450D-ABD6-B4530FE11576}" destId="{B09D06CF-E959-4471-9FC0-4A6E69C23715}" srcOrd="0" destOrd="0" presId="urn:microsoft.com/office/officeart/2005/8/layout/hierarchy2"/>
-    <dgm:cxn modelId="{2D863E16-4175-413E-B9DD-09269B1AC609}" type="presOf" srcId="{FF48C3AE-5DDD-46F8-84C3-EE9D6E39914E}" destId="{EBF98E28-0F71-40D7-96E0-C2EABBE8E075}" srcOrd="1" destOrd="0" presId="urn:microsoft.com/office/officeart/2005/8/layout/hierarchy2"/>
-    <dgm:cxn modelId="{ACB00330-157E-42CD-AE23-38E8D6C84DFD}" type="presOf" srcId="{FF48C3AE-5DDD-46F8-84C3-EE9D6E39914E}" destId="{79DFBC0B-643D-473A-A2C8-5EF802ECF998}" srcOrd="0" destOrd="0" presId="urn:microsoft.com/office/officeart/2005/8/layout/hierarchy2"/>
-    <dgm:cxn modelId="{0C9EB94D-ADE0-4DAF-800A-0EB7CD8CCB74}" type="presOf" srcId="{8830E416-AD45-4161-B7B5-365DA1F10A49}" destId="{19ACA653-2757-466D-814C-3CDC1E33AB08}" srcOrd="1" destOrd="0" presId="urn:microsoft.com/office/officeart/2005/8/layout/hierarchy2"/>
-    <dgm:cxn modelId="{2651258A-3CD0-4FC3-A2B3-359F75C6B3CF}" type="presOf" srcId="{987D5D6B-D14E-4D2C-A174-E0141DC98203}" destId="{71A8CC5E-5BB9-47C0-9139-6A857F1DAD59}" srcOrd="0" destOrd="0" presId="urn:microsoft.com/office/officeart/2005/8/layout/hierarchy2"/>
-    <dgm:cxn modelId="{78FD488C-F373-4FD1-86ED-CCE961CDDE9B}" type="presOf" srcId="{8830E416-AD45-4161-B7B5-365DA1F10A49}" destId="{521053F6-7F7F-4562-A57C-D65242245D5A}" srcOrd="0" destOrd="0" presId="urn:microsoft.com/office/officeart/2005/8/layout/hierarchy2"/>
-    <dgm:cxn modelId="{6E3BAB9F-B3D5-4AAB-8749-F2F8A9A29396}" srcId="{6AFCE692-BBA0-44E9-927C-0E9B7C8DEC2A}" destId="{EEFE5708-3CBB-4D1E-883E-E869178B5652}" srcOrd="0" destOrd="0" parTransId="{47733319-140D-421A-B6C5-6BA22715B9BE}" sibTransId="{D022AF69-9E73-4C0F-9B98-7331798164FC}"/>
     <dgm:cxn modelId="{836E29AB-F4A0-48BA-BA07-B822DD8E1E52}" type="presOf" srcId="{2CC8E05E-2206-407F-8356-5889CFD7BB9E}" destId="{C8173210-5E84-4FF9-9CA9-5CF207B87C4B}" srcOrd="0" destOrd="0" presId="urn:microsoft.com/office/officeart/2005/8/layout/hierarchy2"/>
     <dgm:cxn modelId="{E02120AD-CF4D-4C9A-85CF-6B8B5DB6A45C}" type="presOf" srcId="{6AFCE692-BBA0-44E9-927C-0E9B7C8DEC2A}" destId="{BD7B411B-AF7D-4575-AABF-207D4626C912}" srcOrd="0" destOrd="0" presId="urn:microsoft.com/office/officeart/2005/8/layout/hierarchy2"/>
-    <dgm:cxn modelId="{60EF55AD-BB33-493B-9A05-63BC7432B89C}" srcId="{6AFCE692-BBA0-44E9-927C-0E9B7C8DEC2A}" destId="{7D252F67-8355-450D-ABD6-B4530FE11576}" srcOrd="1" destOrd="0" parTransId="{104DA99D-271E-4DFE-85CB-E8ABAFC9BCE8}" sibTransId="{4A64466C-D213-4B59-A990-EA99346957A3}"/>
-    <dgm:cxn modelId="{2C4684B3-3F26-44CF-8D8D-FA0D7F805889}" srcId="{7D252F67-8355-450D-ABD6-B4530FE11576}" destId="{921F7E0C-0844-4852-A1C7-819C4E187F46}" srcOrd="1" destOrd="0" parTransId="{8830E416-AD45-4161-B7B5-365DA1F10A49}" sibTransId="{24FEF229-4A6E-4302-B527-8F1C79D0BA38}"/>
-    <dgm:cxn modelId="{064AECC1-F72D-41B6-A7E0-987BC1C8801C}" srcId="{7D252F67-8355-450D-ABD6-B4530FE11576}" destId="{987D5D6B-D14E-4D2C-A174-E0141DC98203}" srcOrd="2" destOrd="0" parTransId="{2CC8E05E-2206-407F-8356-5889CFD7BB9E}" sibTransId="{0F7CAF48-473D-4D4A-BC76-6B3A0AB9795C}"/>
-    <dgm:cxn modelId="{CBC796CA-3DED-4B1C-9CB2-A36E44DAA013}" type="presOf" srcId="{EEFE5708-3CBB-4D1E-883E-E869178B5652}" destId="{00C8A6FF-2308-4840-93AF-ABF5D824F921}" srcOrd="0" destOrd="0" presId="urn:microsoft.com/office/officeart/2005/8/layout/hierarchy2"/>
-    <dgm:cxn modelId="{0A4908D5-40AB-4CF5-B3A9-D0A40AA51058}" srcId="{7D252F67-8355-450D-ABD6-B4530FE11576}" destId="{FF28BF28-2050-4518-BABD-86D81BA07B69}" srcOrd="0" destOrd="0" parTransId="{FF48C3AE-5DDD-46F8-84C3-EE9D6E39914E}" sibTransId="{F5C7288B-054A-4617-8DFE-920D62F155D7}"/>
-    <dgm:cxn modelId="{B74A6CD6-0D8D-4320-8E5E-A1DE343A84D4}" type="presOf" srcId="{FF28BF28-2050-4518-BABD-86D81BA07B69}" destId="{615C9960-D98D-4127-BF75-B3A796FD9DE3}" srcOrd="0" destOrd="0" presId="urn:microsoft.com/office/officeart/2005/8/layout/hierarchy2"/>
-    <dgm:cxn modelId="{EA7DBFE5-EBC7-46FC-B959-CAEF6BDC631A}" type="presOf" srcId="{2CC8E05E-2206-407F-8356-5889CFD7BB9E}" destId="{18CC71CA-3BFD-4DD8-B929-12980D15B8FD}" srcOrd="1" destOrd="0" presId="urn:microsoft.com/office/officeart/2005/8/layout/hierarchy2"/>
+    <dgm:cxn modelId="{2651258A-3CD0-4FC3-A2B3-359F75C6B3CF}" type="presOf" srcId="{987D5D6B-D14E-4D2C-A174-E0141DC98203}" destId="{71A8CC5E-5BB9-47C0-9139-6A857F1DAD59}" srcOrd="0" destOrd="0" presId="urn:microsoft.com/office/officeart/2005/8/layout/hierarchy2"/>
     <dgm:cxn modelId="{C7078BD2-5B70-451C-8B6D-5E8E72AB2466}" type="presParOf" srcId="{BD7B411B-AF7D-4575-AABF-207D4626C912}" destId="{BBF63D58-C55D-482D-932E-0CEAAD7B3AEB}" srcOrd="0" destOrd="0" presId="urn:microsoft.com/office/officeart/2005/8/layout/hierarchy2"/>
     <dgm:cxn modelId="{91FDF812-9A6D-4386-B1B1-269C3BA1F493}" type="presParOf" srcId="{BBF63D58-C55D-482D-932E-0CEAAD7B3AEB}" destId="{00C8A6FF-2308-4840-93AF-ABF5D824F921}" srcOrd="0" destOrd="0" presId="urn:microsoft.com/office/officeart/2005/8/layout/hierarchy2"/>
     <dgm:cxn modelId="{F93E9B3B-5E91-4CE2-A628-B4E09289BEF4}" type="presParOf" srcId="{BBF63D58-C55D-482D-932E-0CEAAD7B3AEB}" destId="{CA2EB991-20CB-4AB4-B411-563E6DA18787}" srcOrd="1" destOrd="0" presId="urn:microsoft.com/office/officeart/2005/8/layout/hierarchy2"/>
@@ -2967,7 +3072,7 @@
         </a:bodyPr>
         <a:lstStyle/>
         <a:p>
-          <a:pPr marL="0" lvl="0" indent="0" algn="l" defTabSz="2044700">
+          <a:pPr lvl="0" algn="l" defTabSz="2044700">
             <a:lnSpc>
               <a:spcPct val="90000"/>
             </a:lnSpc>
@@ -2977,7 +3082,6 @@
             <a:spcAft>
               <a:spcPct val="35000"/>
             </a:spcAft>
-            <a:buNone/>
           </a:pPr>
           <a:r>
             <a:rPr lang="fr-FR" sz="4600" b="1" kern="1200"/>
@@ -3050,7 +3154,7 @@
         </a:bodyPr>
         <a:lstStyle/>
         <a:p>
-          <a:pPr marL="0" lvl="0" indent="0" algn="l" defTabSz="2044700">
+          <a:pPr lvl="0" algn="l" defTabSz="2044700">
             <a:lnSpc>
               <a:spcPct val="90000"/>
             </a:lnSpc>
@@ -3060,7 +3164,6 @@
             <a:spcAft>
               <a:spcPct val="35000"/>
             </a:spcAft>
-            <a:buNone/>
           </a:pPr>
           <a:r>
             <a:rPr lang="fr-FR" sz="4600" kern="1200"/>
@@ -3164,7 +3267,7 @@
         </a:bodyPr>
         <a:lstStyle/>
         <a:p>
-          <a:pPr marL="0" lvl="0" indent="0" algn="ctr" defTabSz="933450">
+          <a:pPr lvl="0" algn="ctr" defTabSz="933450">
             <a:lnSpc>
               <a:spcPct val="90000"/>
             </a:lnSpc>
@@ -3174,7 +3277,6 @@
             <a:spcAft>
               <a:spcPct val="35000"/>
             </a:spcAft>
-            <a:buNone/>
           </a:pPr>
           <a:r>
             <a:rPr lang="fr-FR" sz="2100" kern="1200"/>
@@ -3274,7 +3376,7 @@
         </a:bodyPr>
         <a:lstStyle/>
         <a:p>
-          <a:pPr marL="0" lvl="0" indent="0" algn="ctr" defTabSz="933450">
+          <a:pPr lvl="0" algn="ctr" defTabSz="933450">
             <a:lnSpc>
               <a:spcPct val="90000"/>
             </a:lnSpc>
@@ -3284,7 +3386,6 @@
             <a:spcAft>
               <a:spcPct val="35000"/>
             </a:spcAft>
-            <a:buNone/>
           </a:pPr>
           <a:r>
             <a:rPr lang="fr-FR" sz="2100" kern="1200"/>
@@ -3366,7 +3467,7 @@
         </a:bodyPr>
         <a:lstStyle/>
         <a:p>
-          <a:pPr marL="0" lvl="0" indent="0" algn="ctr" defTabSz="266700">
+          <a:pPr lvl="0" algn="ctr" defTabSz="266700">
             <a:lnSpc>
               <a:spcPct val="90000"/>
             </a:lnSpc>
@@ -3376,7 +3477,6 @@
             <a:spcAft>
               <a:spcPct val="35000"/>
             </a:spcAft>
-            <a:buNone/>
           </a:pPr>
           <a:endParaRPr lang="en-US" sz="600" kern="1200"/>
         </a:p>
@@ -3464,7 +3564,7 @@
         </a:bodyPr>
         <a:lstStyle/>
         <a:p>
-          <a:pPr marL="0" lvl="0" indent="0" algn="ctr" defTabSz="933450">
+          <a:pPr lvl="0" algn="ctr" defTabSz="933450">
             <a:lnSpc>
               <a:spcPct val="90000"/>
             </a:lnSpc>
@@ -3474,7 +3574,6 @@
             <a:spcAft>
               <a:spcPct val="35000"/>
             </a:spcAft>
-            <a:buNone/>
           </a:pPr>
           <a:r>
             <a:rPr lang="fr-FR" sz="2100" kern="1200"/>
@@ -3548,7 +3647,7 @@
         </a:bodyPr>
         <a:lstStyle/>
         <a:p>
-          <a:pPr marL="0" lvl="0" indent="0" algn="ctr" defTabSz="222250">
+          <a:pPr lvl="0" algn="ctr" defTabSz="222250">
             <a:lnSpc>
               <a:spcPct val="90000"/>
             </a:lnSpc>
@@ -3558,7 +3657,6 @@
             <a:spcAft>
               <a:spcPct val="35000"/>
             </a:spcAft>
-            <a:buNone/>
           </a:pPr>
           <a:endParaRPr lang="en-US" sz="500" kern="1200"/>
         </a:p>
@@ -3646,7 +3744,7 @@
         </a:bodyPr>
         <a:lstStyle/>
         <a:p>
-          <a:pPr marL="0" lvl="0" indent="0" algn="ctr" defTabSz="933450">
+          <a:pPr lvl="0" algn="ctr" defTabSz="933450">
             <a:lnSpc>
               <a:spcPct val="90000"/>
             </a:lnSpc>
@@ -3656,7 +3754,6 @@
             <a:spcAft>
               <a:spcPct val="35000"/>
             </a:spcAft>
-            <a:buNone/>
           </a:pPr>
           <a:r>
             <a:rPr lang="fr-FR" sz="2100" kern="1200"/>
@@ -3730,7 +3827,7 @@
         </a:bodyPr>
         <a:lstStyle/>
         <a:p>
-          <a:pPr marL="0" lvl="0" indent="0" algn="ctr" defTabSz="266700">
+          <a:pPr lvl="0" algn="ctr" defTabSz="266700">
             <a:lnSpc>
               <a:spcPct val="90000"/>
             </a:lnSpc>
@@ -3740,7 +3837,6 @@
             <a:spcAft>
               <a:spcPct val="35000"/>
             </a:spcAft>
-            <a:buNone/>
           </a:pPr>
           <a:endParaRPr lang="en-US" sz="600" kern="1200"/>
         </a:p>
@@ -3828,7 +3924,7 @@
         </a:bodyPr>
         <a:lstStyle/>
         <a:p>
-          <a:pPr marL="0" lvl="0" indent="0" algn="ctr" defTabSz="933450">
+          <a:pPr lvl="0" algn="ctr" defTabSz="933450">
             <a:lnSpc>
               <a:spcPct val="90000"/>
             </a:lnSpc>
@@ -3838,7 +3934,6 @@
             <a:spcAft>
               <a:spcPct val="35000"/>
             </a:spcAft>
-            <a:buNone/>
           </a:pPr>
           <a:r>
             <a:rPr lang="fr-FR" sz="2100" kern="1200"/>
@@ -6558,7 +6653,7 @@
           <a:p>
             <a:fld id="{90CFF981-A0B6-4915-A08B-F5F948A488BF}" type="datetimeFigureOut">
               <a:rPr lang="fr-FR" smtClean="0"/>
-              <a:t>30/04/2023</a:t>
+              <a:t>21/05/2025</a:t>
             </a:fld>
             <a:endParaRPr lang="fr-FR"/>
           </a:p>
@@ -6756,7 +6851,7 @@
           <a:p>
             <a:fld id="{90CFF981-A0B6-4915-A08B-F5F948A488BF}" type="datetimeFigureOut">
               <a:rPr lang="fr-FR" smtClean="0"/>
-              <a:t>30/04/2023</a:t>
+              <a:t>21/05/2025</a:t>
             </a:fld>
             <a:endParaRPr lang="fr-FR"/>
           </a:p>
@@ -6964,7 +7059,7 @@
           <a:p>
             <a:fld id="{90CFF981-A0B6-4915-A08B-F5F948A488BF}" type="datetimeFigureOut">
               <a:rPr lang="fr-FR" smtClean="0"/>
-              <a:t>30/04/2023</a:t>
+              <a:t>21/05/2025</a:t>
             </a:fld>
             <a:endParaRPr lang="fr-FR"/>
           </a:p>
@@ -7162,7 +7257,7 @@
           <a:p>
             <a:fld id="{90CFF981-A0B6-4915-A08B-F5F948A488BF}" type="datetimeFigureOut">
               <a:rPr lang="fr-FR" smtClean="0"/>
-              <a:t>30/04/2023</a:t>
+              <a:t>21/05/2025</a:t>
             </a:fld>
             <a:endParaRPr lang="fr-FR"/>
           </a:p>
@@ -7437,7 +7532,7 @@
           <a:p>
             <a:fld id="{90CFF981-A0B6-4915-A08B-F5F948A488BF}" type="datetimeFigureOut">
               <a:rPr lang="fr-FR" smtClean="0"/>
-              <a:t>30/04/2023</a:t>
+              <a:t>21/05/2025</a:t>
             </a:fld>
             <a:endParaRPr lang="fr-FR"/>
           </a:p>
@@ -7702,7 +7797,7 @@
           <a:p>
             <a:fld id="{90CFF981-A0B6-4915-A08B-F5F948A488BF}" type="datetimeFigureOut">
               <a:rPr lang="fr-FR" smtClean="0"/>
-              <a:t>30/04/2023</a:t>
+              <a:t>21/05/2025</a:t>
             </a:fld>
             <a:endParaRPr lang="fr-FR"/>
           </a:p>
@@ -8114,7 +8209,7 @@
           <a:p>
             <a:fld id="{90CFF981-A0B6-4915-A08B-F5F948A488BF}" type="datetimeFigureOut">
               <a:rPr lang="fr-FR" smtClean="0"/>
-              <a:t>30/04/2023</a:t>
+              <a:t>21/05/2025</a:t>
             </a:fld>
             <a:endParaRPr lang="fr-FR"/>
           </a:p>
@@ -8255,7 +8350,7 @@
           <a:p>
             <a:fld id="{90CFF981-A0B6-4915-A08B-F5F948A488BF}" type="datetimeFigureOut">
               <a:rPr lang="fr-FR" smtClean="0"/>
-              <a:t>30/04/2023</a:t>
+              <a:t>21/05/2025</a:t>
             </a:fld>
             <a:endParaRPr lang="fr-FR"/>
           </a:p>
@@ -8368,7 +8463,7 @@
           <a:p>
             <a:fld id="{90CFF981-A0B6-4915-A08B-F5F948A488BF}" type="datetimeFigureOut">
               <a:rPr lang="fr-FR" smtClean="0"/>
-              <a:t>30/04/2023</a:t>
+              <a:t>21/05/2025</a:t>
             </a:fld>
             <a:endParaRPr lang="fr-FR"/>
           </a:p>
@@ -8679,7 +8774,7 @@
           <a:p>
             <a:fld id="{90CFF981-A0B6-4915-A08B-F5F948A488BF}" type="datetimeFigureOut">
               <a:rPr lang="fr-FR" smtClean="0"/>
-              <a:t>30/04/2023</a:t>
+              <a:t>21/05/2025</a:t>
             </a:fld>
             <a:endParaRPr lang="fr-FR"/>
           </a:p>
@@ -8967,7 +9062,7 @@
           <a:p>
             <a:fld id="{90CFF981-A0B6-4915-A08B-F5F948A488BF}" type="datetimeFigureOut">
               <a:rPr lang="fr-FR" smtClean="0"/>
-              <a:t>30/04/2023</a:t>
+              <a:t>21/05/2025</a:t>
             </a:fld>
             <a:endParaRPr lang="fr-FR"/>
           </a:p>
@@ -9238,7 +9333,7 @@
           <a:p>
             <a:fld id="{90CFF981-A0B6-4915-A08B-F5F948A488BF}" type="datetimeFigureOut">
               <a:rPr lang="fr-FR" smtClean="0"/>
-              <a:t>30/04/2023</a:t>
+              <a:t>21/05/2025</a:t>
             </a:fld>
             <a:endParaRPr lang="fr-FR"/>
           </a:p>
@@ -9800,7 +9895,7 @@
                 <a16:creationId xmlns:a16="http://schemas.microsoft.com/office/drawing/2014/main" id="{99192C51-B764-4A9B-9587-5EF8B628B8D9}"/>
               </a:ext>
               <a:ext uri="{C183D7F6-B498-43B3-948B-1728B52AA6E4}">
-                <adec:decorative xmlns:adec="http://schemas.microsoft.com/office/drawing/2017/decorative" val="1"/>
+                <adec:decorative xmlns:adec="http://schemas.microsoft.com/office/drawing/2017/decorative" xmlns="" val="1"/>
               </a:ext>
             </a:extLst>
           </p:cNvPr>
@@ -10052,7 +10147,7 @@
                 <a16:creationId xmlns:a16="http://schemas.microsoft.com/office/drawing/2014/main" id="{99192C51-B764-4A9B-9587-5EF8B628B8D9}"/>
               </a:ext>
               <a:ext uri="{C183D7F6-B498-43B3-948B-1728B52AA6E4}">
-                <adec:decorative xmlns:adec="http://schemas.microsoft.com/office/drawing/2017/decorative" val="1"/>
+                <adec:decorative xmlns:adec="http://schemas.microsoft.com/office/drawing/2017/decorative" xmlns="" val="1"/>
               </a:ext>
             </a:extLst>
           </p:cNvPr>
@@ -10169,62 +10264,67 @@
           <a:lstStyle/>
           <a:p>
             <a:r>
-              <a:rPr lang="fr-FR" sz="2000"/>
+              <a:rPr lang="fr-FR" sz="2000" dirty="0"/>
               <a:t>Piles, files, listes chaînées voire récursivité / boucles.</a:t>
             </a:r>
           </a:p>
           <a:p>
-            <a:endParaRPr lang="fr-FR" sz="2000"/>
-          </a:p>
-          <a:p>
-            <a:r>
-              <a:rPr lang="fr-FR" sz="2000"/>
+            <a:endParaRPr lang="fr-FR" sz="2000" dirty="0"/>
+          </a:p>
+          <a:p>
+            <a:r>
+              <a:rPr lang="fr-FR" sz="2000" dirty="0"/>
               <a:t>Génération d’une </a:t>
             </a:r>
             <a:r>
-              <a:rPr lang="fr-FR" sz="2000" b="1"/>
+              <a:rPr lang="fr-FR" sz="2000" b="1" dirty="0"/>
               <a:t>file</a:t>
             </a:r>
             <a:r>
-              <a:rPr lang="fr-FR" sz="2000"/>
+              <a:rPr lang="fr-FR" sz="2000" dirty="0"/>
               <a:t> à partir de </a:t>
             </a:r>
             <a:r>
-              <a:rPr lang="fr-FR" sz="2000" b="1"/>
+              <a:rPr lang="fr-FR" sz="2000" b="1" dirty="0"/>
               <a:t>deux piles</a:t>
             </a:r>
             <a:r>
-              <a:rPr lang="fr-FR" sz="2000"/>
+              <a:rPr lang="fr-FR" sz="2000" dirty="0"/>
               <a:t>.</a:t>
             </a:r>
           </a:p>
           <a:p>
-            <a:endParaRPr lang="fr-FR" sz="2000"/>
-          </a:p>
-          <a:p>
-            <a:r>
-              <a:rPr lang="fr-FR" sz="2000" b="1"/>
+            <a:endParaRPr lang="fr-FR" sz="2000" dirty="0"/>
+          </a:p>
+          <a:p>
+            <a:r>
+              <a:rPr lang="fr-FR" sz="2000" b="1" dirty="0"/>
               <a:t>SGBDR</a:t>
             </a:r>
             <a:r>
-              <a:rPr lang="fr-FR" sz="2000"/>
+              <a:rPr lang="fr-FR" sz="2000" dirty="0"/>
               <a:t>, SQL.</a:t>
             </a:r>
           </a:p>
           <a:p>
-            <a:endParaRPr lang="fr-FR" sz="2000"/>
-          </a:p>
-          <a:p>
-            <a:r>
-              <a:rPr lang="fr-FR" sz="2000"/>
-              <a:t>A voir avec des questions possibles type SES …</a:t>
-            </a:r>
-          </a:p>
-          <a:p>
-            <a:endParaRPr lang="fr-FR" sz="2000"/>
-          </a:p>
-          <a:p>
-            <a:endParaRPr lang="fr-FR" sz="2000"/>
+            <a:endParaRPr lang="fr-FR" sz="2000" dirty="0"/>
+          </a:p>
+          <a:p>
+            <a:r>
+              <a:rPr lang="fr-FR" sz="2000" dirty="0" smtClean="0"/>
+              <a:t>Rôle de l’IA dans la gestion </a:t>
+            </a:r>
+            <a:r>
+              <a:rPr lang="fr-FR" sz="2000" smtClean="0"/>
+              <a:t>des stocks ?</a:t>
+            </a:r>
+            <a:endParaRPr lang="fr-FR" sz="2000" dirty="0"/>
+          </a:p>
+          <a:p>
+            <a:endParaRPr lang="fr-FR" sz="2000" dirty="0"/>
+          </a:p>
+          <a:p>
+            <a:endParaRPr lang="fr-FR" sz="2000" dirty="0"/>
           </a:p>
         </p:txBody>
       </p:sp>
@@ -10306,7 +10406,7 @@
                 <a16:creationId xmlns:a16="http://schemas.microsoft.com/office/drawing/2014/main" id="{C5278130-DFE0-457B-8698-88DF69019DDE}"/>
               </a:ext>
               <a:ext uri="{C183D7F6-B498-43B3-948B-1728B52AA6E4}">
-                <adec:decorative xmlns:adec="http://schemas.microsoft.com/office/drawing/2017/decorative" val="1"/>
+                <adec:decorative xmlns:adec="http://schemas.microsoft.com/office/drawing/2017/decorative" xmlns="" val="1"/>
               </a:ext>
             </a:extLst>
           </p:cNvPr>
@@ -10463,7 +10563,7 @@
                 <a16:creationId xmlns:a16="http://schemas.microsoft.com/office/drawing/2014/main" id="{2F99531B-1681-4D6E-BECB-18325B33A618}"/>
               </a:ext>
               <a:ext uri="{C183D7F6-B498-43B3-948B-1728B52AA6E4}">
-                <adec:decorative xmlns:adec="http://schemas.microsoft.com/office/drawing/2017/decorative" val="1"/>
+                <adec:decorative xmlns:adec="http://schemas.microsoft.com/office/drawing/2017/decorative" xmlns="" val="1"/>
               </a:ext>
             </a:extLst>
           </p:cNvPr>
@@ -10622,7 +10722,7 @@
                 <a16:creationId xmlns:a16="http://schemas.microsoft.com/office/drawing/2014/main" id="{20344094-430A-400B-804B-910E696A1A90}"/>
               </a:ext>
               <a:ext uri="{C183D7F6-B498-43B3-948B-1728B52AA6E4}">
-                <adec:decorative xmlns:adec="http://schemas.microsoft.com/office/drawing/2017/decorative" val="1"/>
+                <adec:decorative xmlns:adec="http://schemas.microsoft.com/office/drawing/2017/decorative" xmlns="" val="1"/>
               </a:ext>
             </a:extLst>
           </p:cNvPr>
@@ -10685,7 +10785,7 @@
                 <a16:creationId xmlns:a16="http://schemas.microsoft.com/office/drawing/2014/main" id="{453C67DF-7782-4E57-AB9B-F1B4811AD8FE}"/>
               </a:ext>
               <a:ext uri="{C183D7F6-B498-43B3-948B-1728B52AA6E4}">
-                <adec:decorative xmlns:adec="http://schemas.microsoft.com/office/drawing/2017/decorative" val="1"/>
+                <adec:decorative xmlns:adec="http://schemas.microsoft.com/office/drawing/2017/decorative" xmlns="" val="1"/>
               </a:ext>
             </a:extLst>
           </p:cNvPr>
@@ -10825,7 +10925,7 @@
                 <a16:creationId xmlns:a16="http://schemas.microsoft.com/office/drawing/2014/main" id="{B03A5AE3-BD30-455C-842B-7626C8BEF097}"/>
               </a:ext>
               <a:ext uri="{C183D7F6-B498-43B3-948B-1728B52AA6E4}">
-                <adec:decorative xmlns:adec="http://schemas.microsoft.com/office/drawing/2017/decorative" val="1"/>
+                <adec:decorative xmlns:adec="http://schemas.microsoft.com/office/drawing/2017/decorative" xmlns="" val="1"/>
               </a:ext>
             </a:extLst>
           </p:cNvPr>
@@ -10878,7 +10978,7 @@
                 <a16:creationId xmlns:a16="http://schemas.microsoft.com/office/drawing/2014/main" id="{2DBECAA5-1F2D-470D-875C-8F2C2CA3E54B}"/>
               </a:ext>
               <a:ext uri="{C183D7F6-B498-43B3-948B-1728B52AA6E4}">
-                <adec:decorative xmlns:adec="http://schemas.microsoft.com/office/drawing/2017/decorative" val="1"/>
+                <adec:decorative xmlns:adec="http://schemas.microsoft.com/office/drawing/2017/decorative" xmlns="" val="1"/>
               </a:ext>
             </a:extLst>
           </p:cNvPr>
@@ -10997,7 +11097,7 @@
                 <a16:creationId xmlns:a16="http://schemas.microsoft.com/office/drawing/2014/main" id="{04812C46-200A-4DEB-A05E-3ED6C68C2387}"/>
               </a:ext>
               <a:ext uri="{C183D7F6-B498-43B3-948B-1728B52AA6E4}">
-                <adec:decorative xmlns:adec="http://schemas.microsoft.com/office/drawing/2017/decorative" val="1"/>
+                <adec:decorative xmlns:adec="http://schemas.microsoft.com/office/drawing/2017/decorative" xmlns="" val="1"/>
               </a:ext>
             </a:extLst>
           </p:cNvPr>
@@ -11086,7 +11186,7 @@
                 <a16:creationId xmlns:a16="http://schemas.microsoft.com/office/drawing/2014/main" id="{D1EA859B-E555-4109-94F3-6700E046E008}"/>
               </a:ext>
               <a:ext uri="{C183D7F6-B498-43B3-948B-1728B52AA6E4}">
-                <adec:decorative xmlns:adec="http://schemas.microsoft.com/office/drawing/2017/decorative" val="1"/>
+                <adec:decorative xmlns:adec="http://schemas.microsoft.com/office/drawing/2017/decorative" xmlns="" val="1"/>
               </a:ext>
             </a:extLst>
           </p:cNvPr>
@@ -11327,7 +11427,7 @@
                 <a16:creationId xmlns:a16="http://schemas.microsoft.com/office/drawing/2014/main" id="{73C994B4-9721-4148-9EEC-6793CECDE8DD}"/>
               </a:ext>
               <a:ext uri="{C183D7F6-B498-43B3-948B-1728B52AA6E4}">
-                <adec:decorative xmlns:adec="http://schemas.microsoft.com/office/drawing/2017/decorative" val="1"/>
+                <adec:decorative xmlns:adec="http://schemas.microsoft.com/office/drawing/2017/decorative" xmlns="" val="1"/>
               </a:ext>
             </a:extLst>
           </p:cNvPr>
@@ -11482,7 +11582,7 @@
                 <a16:creationId xmlns:a16="http://schemas.microsoft.com/office/drawing/2014/main" id="{F9D95E49-763A-4886-B038-82F734740554}"/>
               </a:ext>
               <a:ext uri="{C183D7F6-B498-43B3-948B-1728B52AA6E4}">
-                <adec:decorative xmlns:adec="http://schemas.microsoft.com/office/drawing/2017/decorative" val="1"/>
+                <adec:decorative xmlns:adec="http://schemas.microsoft.com/office/drawing/2017/decorative" xmlns="" val="1"/>
               </a:ext>
             </a:extLst>
           </p:cNvPr>
@@ -11641,7 +11741,7 @@
                 <a16:creationId xmlns:a16="http://schemas.microsoft.com/office/drawing/2014/main" id="{FFC9858F-A31F-4B2E-998C-663913EFD28C}"/>
               </a:ext>
               <a:ext uri="{C183D7F6-B498-43B3-948B-1728B52AA6E4}">
-                <adec:decorative xmlns:adec="http://schemas.microsoft.com/office/drawing/2017/decorative" val="1"/>
+                <adec:decorative xmlns:adec="http://schemas.microsoft.com/office/drawing/2017/decorative" xmlns="" val="1"/>
               </a:ext>
             </a:extLst>
           </p:cNvPr>
@@ -11744,7 +11844,7 @@
                 <a16:creationId xmlns:a16="http://schemas.microsoft.com/office/drawing/2014/main" id="{DF790E19-E9B6-4BD2-909F-5CC48808D217}"/>
               </a:ext>
               <a:ext uri="{C183D7F6-B498-43B3-948B-1728B52AA6E4}">
-                <adec:decorative xmlns:adec="http://schemas.microsoft.com/office/drawing/2017/decorative" val="1"/>
+                <adec:decorative xmlns:adec="http://schemas.microsoft.com/office/drawing/2017/decorative" xmlns="" val="1"/>
               </a:ext>
             </a:extLst>
           </p:cNvPr>
@@ -11936,7 +12036,7 @@
                 <a16:creationId xmlns:a16="http://schemas.microsoft.com/office/drawing/2014/main" id="{F085D7B9-E066-4923-8CB7-294BF306296A}"/>
               </a:ext>
               <a:ext uri="{C183D7F6-B498-43B3-948B-1728B52AA6E4}">
-                <adec:decorative xmlns:adec="http://schemas.microsoft.com/office/drawing/2017/decorative" val="1"/>
+                <adec:decorative xmlns:adec="http://schemas.microsoft.com/office/drawing/2017/decorative" xmlns="" val="1"/>
               </a:ext>
             </a:extLst>
           </p:cNvPr>
@@ -11989,7 +12089,7 @@
                 <a16:creationId xmlns:a16="http://schemas.microsoft.com/office/drawing/2014/main" id="{63A4393C-77E8-4622-B7C7-5C6E80973CCA}"/>
               </a:ext>
               <a:ext uri="{C183D7F6-B498-43B3-948B-1728B52AA6E4}">
-                <adec:decorative xmlns:adec="http://schemas.microsoft.com/office/drawing/2017/decorative" val="1"/>
+                <adec:decorative xmlns:adec="http://schemas.microsoft.com/office/drawing/2017/decorative" xmlns="" val="1"/>
               </a:ext>
             </a:extLst>
           </p:cNvPr>
@@ -12117,7 +12217,7 @@
                 <a16:creationId xmlns:a16="http://schemas.microsoft.com/office/drawing/2014/main" id="{B50AB553-2A96-4A92-96F2-93548E096954}"/>
               </a:ext>
               <a:ext uri="{C183D7F6-B498-43B3-948B-1728B52AA6E4}">
-                <adec:decorative xmlns:adec="http://schemas.microsoft.com/office/drawing/2017/decorative" val="1"/>
+                <adec:decorative xmlns:adec="http://schemas.microsoft.com/office/drawing/2017/decorative" xmlns="" val="1"/>
               </a:ext>
             </a:extLst>
           </p:cNvPr>
@@ -12299,7 +12399,7 @@
                 <a16:creationId xmlns:a16="http://schemas.microsoft.com/office/drawing/2014/main" id="{04812C46-200A-4DEB-A05E-3ED6C68C2387}"/>
               </a:ext>
               <a:ext uri="{C183D7F6-B498-43B3-948B-1728B52AA6E4}">
-                <adec:decorative xmlns:adec="http://schemas.microsoft.com/office/drawing/2017/decorative" val="1"/>
+                <adec:decorative xmlns:adec="http://schemas.microsoft.com/office/drawing/2017/decorative" xmlns="" val="1"/>
               </a:ext>
             </a:extLst>
           </p:cNvPr>
@@ -12388,7 +12488,7 @@
                 <a16:creationId xmlns:a16="http://schemas.microsoft.com/office/drawing/2014/main" id="{D1EA859B-E555-4109-94F3-6700E046E008}"/>
               </a:ext>
               <a:ext uri="{C183D7F6-B498-43B3-948B-1728B52AA6E4}">
-                <adec:decorative xmlns:adec="http://schemas.microsoft.com/office/drawing/2017/decorative" val="1"/>
+                <adec:decorative xmlns:adec="http://schemas.microsoft.com/office/drawing/2017/decorative" xmlns="" val="1"/>
               </a:ext>
             </a:extLst>
           </p:cNvPr>
@@ -12611,7 +12711,7 @@
                 <a16:creationId xmlns:a16="http://schemas.microsoft.com/office/drawing/2014/main" id="{100EDD19-6802-4EC3-95CE-CFFAB042CFD6}"/>
               </a:ext>
               <a:ext uri="{C183D7F6-B498-43B3-948B-1728B52AA6E4}">
-                <adec:decorative xmlns:adec="http://schemas.microsoft.com/office/drawing/2017/decorative" val="1"/>
+                <adec:decorative xmlns:adec="http://schemas.microsoft.com/office/drawing/2017/decorative" xmlns="" val="1"/>
               </a:ext>
             </a:extLst>
           </p:cNvPr>
@@ -12707,7 +12807,7 @@
                 <a16:creationId xmlns:a16="http://schemas.microsoft.com/office/drawing/2014/main" id="{DB17E863-922E-4C26-BD64-E8FD41D28661}"/>
               </a:ext>
               <a:ext uri="{C183D7F6-B498-43B3-948B-1728B52AA6E4}">
-                <adec:decorative xmlns:adec="http://schemas.microsoft.com/office/drawing/2017/decorative" val="1"/>
+                <adec:decorative xmlns:adec="http://schemas.microsoft.com/office/drawing/2017/decorative" xmlns="" val="1"/>
               </a:ext>
             </a:extLst>
           </p:cNvPr>
@@ -13300,7 +13400,7 @@
             <a:round/>
             <a:extLst>
               <a:ext uri="{C807C97D-BFC1-408E-A445-0C87EB9F89A2}">
-                <ask:lineSketchStyleProps xmlns:ask="http://schemas.microsoft.com/office/drawing/2018/sketchyshapes" sd="1219033472">
+                <ask:lineSketchStyleProps xmlns:ask="http://schemas.microsoft.com/office/drawing/2018/sketchyshapes" xmlns="" sd="1219033472">
                   <a:prstGeom prst="rect">
                     <a:avLst/>
                   </a:prstGeom>
@@ -13675,7 +13775,7 @@
                 <a16:creationId xmlns:a16="http://schemas.microsoft.com/office/drawing/2014/main" id="{04812C46-200A-4DEB-A05E-3ED6C68C2387}"/>
               </a:ext>
               <a:ext uri="{C183D7F6-B498-43B3-948B-1728B52AA6E4}">
-                <adec:decorative xmlns:adec="http://schemas.microsoft.com/office/drawing/2017/decorative" val="1"/>
+                <adec:decorative xmlns:adec="http://schemas.microsoft.com/office/drawing/2017/decorative" xmlns="" val="1"/>
               </a:ext>
             </a:extLst>
           </p:cNvPr>
@@ -13764,7 +13864,7 @@
                 <a16:creationId xmlns:a16="http://schemas.microsoft.com/office/drawing/2014/main" id="{D1EA859B-E555-4109-94F3-6700E046E008}"/>
               </a:ext>
               <a:ext uri="{C183D7F6-B498-43B3-948B-1728B52AA6E4}">
-                <adec:decorative xmlns:adec="http://schemas.microsoft.com/office/drawing/2017/decorative" val="1"/>
+                <adec:decorative xmlns:adec="http://schemas.microsoft.com/office/drawing/2017/decorative" xmlns="" val="1"/>
               </a:ext>
             </a:extLst>
           </p:cNvPr>
